--- a/docs/VKU-360-Quest-thuyet-trinh-5-phut.pptx
+++ b/docs/VKU-360-Quest-thuyet-trinh-5-phut.pptx
@@ -496,7 +496,30 @@
         <p:txBody>
           <a:bodyPr xmlns:a="http://schemas.openxmlformats.org/drawingml/2006/main"/>
           <a:lstStyle xmlns:a="http://schemas.openxmlformats.org/drawingml/2006/main"/>
-          <a:p xmlns:a="http://schemas.openxmlformats.org/drawingml/2006/main"/>
+          <a:p xmlns:a="http://schemas.openxmlformats.org/drawingml/2006/main">
+            <a:r>
+              <a:rPr lang="vi-VN" sz="1400"/>
+              <a:t>Lời thoại ngắn:</a:t>
+            </a:r>
+          </a:p>
+          <a:p xmlns:a="http://schemas.openxmlformats.org/drawingml/2006/main">
+            <a:r>
+              <a:rPr lang="vi-VN" sz="1400"/>
+              <a:t>Em xin chào thầy cô và các bạn. Sản phẩm của em là VKU 360 Quest, một website biến việc tham quan VKU thành hành trình 360 độ có nhiệm vụ, tiến trình cá nhân và AI guide đồng hành.</a:t>
+            </a:r>
+          </a:p>
+          <a:p xmlns:a="http://schemas.openxmlformats.org/drawingml/2006/main">
+            <a:r>
+              <a:rPr lang="vi-VN" sz="1400"/>
+              <a:t>Trong 5 phút, em sẽ đi nhanh qua ý tưởng, công nghệ và demo luồng chính của sản phẩm.</a:t>
+            </a:r>
+          </a:p>
+          <a:p xmlns:a="http://schemas.openxmlformats.org/drawingml/2006/main">
+            <a:r>
+              <a:rPr lang="vi-VN" sz="1400"/>
+              <a:t>Nhấn mạnh: tour 360 + nhiệm vụ + dữ liệu cá nhân + AI guide.</a:t>
+            </a:r>
+          </a:p>
         </p:txBody>
       </p:sp>
       <p:sp>
@@ -562,7 +585,30 @@
         <p:txBody>
           <a:bodyPr xmlns:a="http://schemas.openxmlformats.org/drawingml/2006/main"/>
           <a:lstStyle xmlns:a="http://schemas.openxmlformats.org/drawingml/2006/main"/>
-          <a:p xmlns:a="http://schemas.openxmlformats.org/drawingml/2006/main"/>
+          <a:p xmlns:a="http://schemas.openxmlformats.org/drawingml/2006/main">
+            <a:r>
+              <a:rPr lang="vi-VN" sz="1400"/>
+              <a:t>Lời thoại ngắn:</a:t>
+            </a:r>
+          </a:p>
+          <a:p xmlns:a="http://schemas.openxmlformats.org/drawingml/2006/main">
+            <a:r>
+              <a:rPr lang="vi-VN" sz="1400"/>
+              <a:t>Vấn đề là tân sinh viên hoặc khách tham quan thường khó hình dung các khu trong trường nếu chỉ xem ảnh, bài giới thiệu hay bản đồ tĩnh.</a:t>
+            </a:r>
+          </a:p>
+          <a:p xmlns:a="http://schemas.openxmlformats.org/drawingml/2006/main">
+            <a:r>
+              <a:rPr lang="vi-VN" sz="1400"/>
+              <a:t>VKU 360 Quest chuyển việc đó thành một hành trình: mỗi chặng có ảnh 360, câu chuyện ngắn, nhiệm vụ nhỏ và bước đi tiếp theo.</a:t>
+            </a:r>
+          </a:p>
+          <a:p xmlns:a="http://schemas.openxmlformats.org/drawingml/2006/main">
+            <a:r>
+              <a:rPr lang="vi-VN" sz="1400"/>
+              <a:t>Điểm khác biệt là người dùng không chỉ xem thông tin, mà có cảm giác mình đang khám phá.</a:t>
+            </a:r>
+          </a:p>
         </p:txBody>
       </p:sp>
       <p:sp>
@@ -628,7 +674,30 @@
         <p:txBody>
           <a:bodyPr xmlns:a="http://schemas.openxmlformats.org/drawingml/2006/main"/>
           <a:lstStyle xmlns:a="http://schemas.openxmlformats.org/drawingml/2006/main"/>
-          <a:p xmlns:a="http://schemas.openxmlformats.org/drawingml/2006/main"/>
+          <a:p xmlns:a="http://schemas.openxmlformats.org/drawingml/2006/main">
+            <a:r>
+              <a:rPr lang="vi-VN" sz="1400"/>
+              <a:t>Lời thoại ngắn:</a:t>
+            </a:r>
+          </a:p>
+          <a:p xmlns:a="http://schemas.openxmlformats.org/drawingml/2006/main">
+            <a:r>
+              <a:rPr lang="vi-VN" sz="1400"/>
+              <a:t>Luồng sử dụng gồm 5 bước: đăng nhập, chọn avatar, vào tour 360, xem bản đồ lộ trình, và hỏi VKU Guide khi cần.</a:t>
+            </a:r>
+          </a:p>
+          <a:p xmlns:a="http://schemas.openxmlformats.org/drawingml/2006/main">
+            <a:r>
+              <a:rPr lang="vi-VN" sz="1400"/>
+              <a:t>Hệ thống bám theo tiến trình của người dùng, biết đang ở chặng nào và đã mở khóa tới đâu.</a:t>
+            </a:r>
+          </a:p>
+          <a:p xmlns:a="http://schemas.openxmlformats.org/drawingml/2006/main">
+            <a:r>
+              <a:rPr lang="vi-VN" sz="1400"/>
+              <a:t>Thông điệp chính: website không chỉ là panorama, mà là một hành trình có trạng thái.</a:t>
+            </a:r>
+          </a:p>
         </p:txBody>
       </p:sp>
       <p:sp>
@@ -694,7 +763,36 @@
         <p:txBody>
           <a:bodyPr xmlns:a="http://schemas.openxmlformats.org/drawingml/2006/main"/>
           <a:lstStyle xmlns:a="http://schemas.openxmlformats.org/drawingml/2006/main"/>
-          <a:p xmlns:a="http://schemas.openxmlformats.org/drawingml/2006/main"/>
+          <a:p xmlns:a="http://schemas.openxmlformats.org/drawingml/2006/main">
+            <a:r>
+              <a:rPr lang="vi-VN" sz="1400"/>
+              <a:t>Lời thoại ngắn:</a:t>
+            </a:r>
+          </a:p>
+          <a:p xmlns:a="http://schemas.openxmlformats.org/drawingml/2006/main">
+            <a:r>
+              <a:rPr lang="vi-VN" sz="1400"/>
+              <a:t>Khi demo, em sẽ đi đúng theo flow này để chứng minh sản phẩm đang chạy thật.</a:t>
+            </a:r>
+          </a:p>
+          <a:p xmlns:a="http://schemas.openxmlformats.org/drawingml/2006/main">
+            <a:r>
+              <a:rPr lang="vi-VN" sz="1400"/>
+              <a:t>Đầu tiên là đăng nhập và trang chủ, tiếp theo vào tour 360 để xoay panorama và hoàn thành nhiệm vụ.</a:t>
+            </a:r>
+          </a:p>
+          <a:p xmlns:a="http://schemas.openxmlformats.org/drawingml/2006/main">
+            <a:r>
+              <a:rPr lang="vi-VN" sz="1400"/>
+              <a:t>Sau đó mở bản đồ/lộ trình, thử hỏi VKU Guide vài câu theo ngữ cảnh, rồi kết thúc bằng profile, avatar hoặc khoảnh khắc cộng đồng.</a:t>
+            </a:r>
+          </a:p>
+          <a:p xmlns:a="http://schemas.openxmlformats.org/drawingml/2006/main">
+            <a:r>
+              <a:rPr lang="vi-VN" sz="1400"/>
+              <a:t>Câu chốt: tour + dữ liệu + AI guide.</a:t>
+            </a:r>
+          </a:p>
         </p:txBody>
       </p:sp>
       <p:sp>
@@ -760,7 +858,30 @@
         <p:txBody>
           <a:bodyPr xmlns:a="http://schemas.openxmlformats.org/drawingml/2006/main"/>
           <a:lstStyle xmlns:a="http://schemas.openxmlformats.org/drawingml/2006/main"/>
-          <a:p xmlns:a="http://schemas.openxmlformats.org/drawingml/2006/main"/>
+          <a:p xmlns:a="http://schemas.openxmlformats.org/drawingml/2006/main">
+            <a:r>
+              <a:rPr lang="vi-VN" sz="1400"/>
+              <a:t>Lời thoại ngắn:</a:t>
+            </a:r>
+          </a:p>
+          <a:p xmlns:a="http://schemas.openxmlformats.org/drawingml/2006/main">
+            <a:r>
+              <a:rPr lang="vi-VN" sz="1400"/>
+              <a:t>Về công nghệ, frontend được giữ gọn bằng HTML, CSS và JavaScript để dễ deploy và chạy nhẹ.</a:t>
+            </a:r>
+          </a:p>
+          <a:p xmlns:a="http://schemas.openxmlformats.org/drawingml/2006/main">
+            <a:r>
+              <a:rPr lang="vi-VN" sz="1400"/>
+              <a:t>Firebase phụ trách đăng nhập, lưu tiến trình, hồ sơ, lịch sử chat và ảnh upload.</a:t>
+            </a:r>
+          </a:p>
+          <a:p xmlns:a="http://schemas.openxmlformats.org/drawingml/2006/main">
+            <a:r>
+              <a:rPr lang="vi-VN" sz="1400"/>
+              <a:t>Cloud Functions nằm giữa frontend và Gemini API, nên API key không bị lộ trên mã nguồn phía client.</a:t>
+            </a:r>
+          </a:p>
         </p:txBody>
       </p:sp>
       <p:sp>
@@ -826,7 +947,36 @@
         <p:txBody>
           <a:bodyPr xmlns:a="http://schemas.openxmlformats.org/drawingml/2006/main"/>
           <a:lstStyle xmlns:a="http://schemas.openxmlformats.org/drawingml/2006/main"/>
-          <a:p xmlns:a="http://schemas.openxmlformats.org/drawingml/2006/main"/>
+          <a:p xmlns:a="http://schemas.openxmlformats.org/drawingml/2006/main">
+            <a:r>
+              <a:rPr lang="vi-VN" sz="1400"/>
+              <a:t>Lời thoại ngắn:</a:t>
+            </a:r>
+          </a:p>
+          <a:p xmlns:a="http://schemas.openxmlformats.org/drawingml/2006/main">
+            <a:r>
+              <a:rPr lang="vi-VN" sz="1400"/>
+              <a:t>VKU Guide không gọi Gemini trực tiếp từ trình duyệt.</a:t>
+            </a:r>
+          </a:p>
+          <a:p xmlns:a="http://schemas.openxmlformats.org/drawingml/2006/main">
+            <a:r>
+              <a:rPr lang="vi-VN" sz="1400"/>
+              <a:t>Mỗi câu hỏi được gửi qua Cloud Function, kèm theo ngôn ngữ, lịch sử chat, chặng hiện tại, bước hiện tại và trạng thái mở khóa.</a:t>
+            </a:r>
+          </a:p>
+          <a:p xmlns:a="http://schemas.openxmlformats.org/drawingml/2006/main">
+            <a:r>
+              <a:rPr lang="vi-VN" sz="1400"/>
+              <a:t>Function kiểm tra đăng nhập, giới hạn độ dài và làm sạch dữ liệu trước khi gọi model; nếu gặp lỗi quota thì có fallback offline.</a:t>
+            </a:r>
+          </a:p>
+          <a:p xmlns:a="http://schemas.openxmlformats.org/drawingml/2006/main">
+            <a:r>
+              <a:rPr lang="vi-VN" sz="1400"/>
+              <a:t>Điểm bảo mật: Gemini API key nằm trong Firebase Secret.</a:t>
+            </a:r>
+          </a:p>
         </p:txBody>
       </p:sp>
       <p:sp>
@@ -892,7 +1042,30 @@
         <p:txBody>
           <a:bodyPr xmlns:a="http://schemas.openxmlformats.org/drawingml/2006/main"/>
           <a:lstStyle xmlns:a="http://schemas.openxmlformats.org/drawingml/2006/main"/>
-          <a:p xmlns:a="http://schemas.openxmlformats.org/drawingml/2006/main"/>
+          <a:p xmlns:a="http://schemas.openxmlformats.org/drawingml/2006/main">
+            <a:r>
+              <a:rPr lang="vi-VN" sz="1400"/>
+              <a:t>Lời thoại ngắn:</a:t>
+            </a:r>
+          </a:p>
+          <a:p xmlns:a="http://schemas.openxmlformats.org/drawingml/2006/main">
+            <a:r>
+              <a:rPr lang="vi-VN" sz="1400"/>
+              <a:t>Mỗi nhóm dữ liệu có nơi lưu và rule riêng.</a:t>
+            </a:r>
+          </a:p>
+          <a:p xmlns:a="http://schemas.openxmlformats.org/drawingml/2006/main">
+            <a:r>
+              <a:rPr lang="vi-VN" sz="1400"/>
+              <a:t>Tiến trình tour và lịch sử chat lưu theo UID, ảnh và sự kiện có kiểm soát signed-in user và visibility, còn avatar và route là dữ liệu tĩnh trong repo.</a:t>
+            </a:r>
+          </a:p>
+          <a:p xmlns:a="http://schemas.openxmlformats.org/drawingml/2006/main">
+            <a:r>
+              <a:rPr lang="vi-VN" sz="1400"/>
+              <a:t>Thông điệp chính là Firebase giúp sản phẩm có tài khoản, đồng bộ tiến trình và bảo vệ dữ liệu người dùng.</a:t>
+            </a:r>
+          </a:p>
         </p:txBody>
       </p:sp>
       <p:sp>
@@ -958,7 +1131,30 @@
         <p:txBody>
           <a:bodyPr xmlns:a="http://schemas.openxmlformats.org/drawingml/2006/main"/>
           <a:lstStyle xmlns:a="http://schemas.openxmlformats.org/drawingml/2006/main"/>
-          <a:p xmlns:a="http://schemas.openxmlformats.org/drawingml/2006/main"/>
+          <a:p xmlns:a="http://schemas.openxmlformats.org/drawingml/2006/main">
+            <a:r>
+              <a:rPr lang="vi-VN" sz="1400"/>
+              <a:t>Lời thoại ngắn:</a:t>
+            </a:r>
+          </a:p>
+          <a:p xmlns:a="http://schemas.openxmlformats.org/drawingml/2006/main">
+            <a:r>
+              <a:rPr lang="vi-VN" sz="1400"/>
+              <a:t>Tóm lại, VKU 360 Quest đã có nền tảng đủ để demo: trực quan bằng ảnh 360, tương tác bằng nhiệm vụ và tiến trình, thông minh bằng VKU Guide, và có khả năng mở rộng thêm địa điểm, leaderboard, sự kiện hoặc quản trị nội dung.</a:t>
+            </a:r>
+          </a:p>
+          <a:p xmlns:a="http://schemas.openxmlformats.org/drawingml/2006/main">
+            <a:r>
+              <a:rPr lang="vi-VN" sz="1400"/>
+              <a:t>Sản phẩm có thể dùng cho tân sinh viên, khách tham quan và truyền thông tuyển sinh.</a:t>
+            </a:r>
+          </a:p>
+          <a:p xmlns:a="http://schemas.openxmlformats.org/drawingml/2006/main">
+            <a:r>
+              <a:rPr lang="vi-VN" sz="1400"/>
+              <a:t>Em xin cảm ơn thầy cô và các bạn đã lắng nghe.</a:t>
+            </a:r>
+          </a:p>
         </p:txBody>
       </p:sp>
       <p:sp>
